--- a/slides/Math130Unit2D.pptx
+++ b/slides/Math130Unit2D.pptx
@@ -11830,7 +11830,7 @@
                 <a:ea typeface="Calibri" pitchFamily="34" charset="-122"/>
                 <a:cs typeface="Calibri" pitchFamily="34" charset="-120"/>
               </a:rPr>
-              <a:t>= 1000π/3 ≈ 1047.2 ft²</a:t>
+              <a:t>= 500π/3 ≈ 523.60 ft²</a:t>
             </a:r>
             <a:endParaRPr lang="en-US" sz="1150" dirty="0"/>
           </a:p>
